--- a/02 Osnove Informacione Bezbednosti/02 Prezentacije/PPTX/04_Imovina_granice_poverenja_i_threat_modeling.pptx
+++ b/02 Osnove Informacione Bezbednosti/02 Prezentacije/PPTX/04_Imovina_granice_poverenja_i_threat_modeling.pptx
@@ -7612,7 +7612,7 @@
                 <a:ea typeface="Aptos Display"/>
                 <a:cs typeface="Aptos Display"/>
               </a:rPr>
-              <a:t>Граница поверења тражи експлицитну проверу</a:t>
+              <a:t>Прелазак границе поверења повећава ризик</a:t>
             </a:r>
           </a:p>
         </p:txBody>
@@ -7673,7 +7673,7 @@
                 <a:ea typeface="Aptos"/>
                 <a:cs typeface="Aptos"/>
               </a:rPr>
-              <a:t>Провера границе поверења претходи обради података који стижу из спољног контекста.</a:t>
+              <a:t>Калкулатор множи вероватноћу и утицај, а ток који прелази границу поверења добија већи фактор.</a:t>
             </a:r>
           </a:p>
         </p:txBody>
@@ -7695,7 +7695,7 @@
         <p:spPr>
           <a:xfrm xmlns:a="http://schemas.openxmlformats.org/drawingml/2006/main">
             <a:off x="666750" y="2095500"/>
-            <a:ext cx="6858000" cy="2133600"/>
+            <a:ext cx="6858000" cy="2812550"/>
           </a:xfrm>
           <a:prstGeom xmlns:a="http://schemas.openxmlformats.org/drawingml/2006/main" prst="roundRect">
             <a:avLst>
@@ -7877,7 +7877,7 @@
           <a:p xmlns:a="http://schemas.openxmlformats.org/drawingml/2006/main">
             <a:pPr algn="r">
               <a:lnSpc>
-                <a:spcPct val="100000"/>
+                <a:spcPts val="1300"/>
               </a:lnSpc>
               <a:buNone/>
               <a:defRPr sz="975" b="0">
@@ -7904,7 +7904,7 @@
           <a:p xmlns:a="http://schemas.openxmlformats.org/drawingml/2006/main">
             <a:pPr algn="r">
               <a:lnSpc>
-                <a:spcPct val="100000"/>
+                <a:spcPts val="1300"/>
               </a:lnSpc>
               <a:buNone/>
               <a:defRPr sz="975" b="0">
@@ -7931,7 +7931,7 @@
           <a:p xmlns:a="http://schemas.openxmlformats.org/drawingml/2006/main">
             <a:pPr algn="r">
               <a:lnSpc>
-                <a:spcPct val="100000"/>
+                <a:spcPts val="1300"/>
               </a:lnSpc>
               <a:buNone/>
               <a:defRPr sz="975" b="0">
@@ -7958,7 +7958,7 @@
           <a:p xmlns:a="http://schemas.openxmlformats.org/drawingml/2006/main">
             <a:pPr algn="r">
               <a:lnSpc>
-                <a:spcPct val="100000"/>
+                <a:spcPts val="1300"/>
               </a:lnSpc>
               <a:buNone/>
               <a:defRPr sz="975" b="0">
@@ -7985,7 +7985,7 @@
           <a:p xmlns:a="http://schemas.openxmlformats.org/drawingml/2006/main">
             <a:pPr algn="r">
               <a:lnSpc>
-                <a:spcPct val="100000"/>
+                <a:spcPts val="1300"/>
               </a:lnSpc>
               <a:buNone/>
               <a:defRPr sz="975" b="0">
@@ -8012,7 +8012,7 @@
           <a:p xmlns:a="http://schemas.openxmlformats.org/drawingml/2006/main">
             <a:pPr algn="r">
               <a:lnSpc>
-                <a:spcPct val="100000"/>
+                <a:spcPts val="1300"/>
               </a:lnSpc>
               <a:buNone/>
               <a:defRPr sz="975" b="0">
@@ -8039,7 +8039,7 @@
           <a:p xmlns:a="http://schemas.openxmlformats.org/drawingml/2006/main">
             <a:pPr algn="r">
               <a:lnSpc>
-                <a:spcPct val="100000"/>
+                <a:spcPts val="1300"/>
               </a:lnSpc>
               <a:buNone/>
               <a:defRPr sz="975" b="0">
@@ -8066,7 +8066,7 @@
           <a:p xmlns:a="http://schemas.openxmlformats.org/drawingml/2006/main">
             <a:pPr algn="r">
               <a:lnSpc>
-                <a:spcPct val="100000"/>
+                <a:spcPts val="1300"/>
               </a:lnSpc>
               <a:buNone/>
               <a:defRPr sz="975" b="0">
@@ -8093,7 +8093,7 @@
           <a:p xmlns:a="http://schemas.openxmlformats.org/drawingml/2006/main">
             <a:pPr algn="r">
               <a:lnSpc>
-                <a:spcPct val="100000"/>
+                <a:spcPts val="1300"/>
               </a:lnSpc>
               <a:buNone/>
               <a:defRPr sz="975" b="0">
@@ -8117,6 +8117,114 @@
               <a:t>9</a:t>
             </a:r>
           </a:p>
+          <a:p xmlns:a="http://schemas.openxmlformats.org/drawingml/2006/main">
+            <a:pPr algn="r">
+              <a:lnSpc>
+                <a:spcPts val="1300"/>
+              </a:lnSpc>
+              <a:buNone/>
+              <a:defRPr sz="975" b="0">
+                <a:solidFill>
+                  <a:srgbClr val="8792A6"/>
+                </a:solidFill>
+                <a:latin typeface="Consolas"/>
+                <a:ea typeface="Consolas"/>
+                <a:cs typeface="Consolas"/>
+              </a:defRPr>
+            </a:pPr>
+            <a:r>
+              <a:rPr sz="975" b="0">
+                <a:solidFill>
+                  <a:srgbClr val="8792A6"/>
+                </a:solidFill>
+                <a:latin typeface="Consolas"/>
+                <a:ea typeface="Consolas"/>
+                <a:cs typeface="Consolas"/>
+              </a:rPr>
+              <a:t>10</a:t>
+            </a:r>
+          </a:p>
+          <a:p xmlns:a="http://schemas.openxmlformats.org/drawingml/2006/main">
+            <a:pPr algn="r">
+              <a:lnSpc>
+                <a:spcPts val="1300"/>
+              </a:lnSpc>
+              <a:buNone/>
+              <a:defRPr sz="975" b="0">
+                <a:solidFill>
+                  <a:srgbClr val="8792A6"/>
+                </a:solidFill>
+                <a:latin typeface="Consolas"/>
+                <a:ea typeface="Consolas"/>
+                <a:cs typeface="Consolas"/>
+              </a:defRPr>
+            </a:pPr>
+            <a:r>
+              <a:rPr sz="975" b="0">
+                <a:solidFill>
+                  <a:srgbClr val="8792A6"/>
+                </a:solidFill>
+                <a:latin typeface="Consolas"/>
+                <a:ea typeface="Consolas"/>
+                <a:cs typeface="Consolas"/>
+              </a:rPr>
+              <a:t>11</a:t>
+            </a:r>
+          </a:p>
+          <a:p xmlns:a="http://schemas.openxmlformats.org/drawingml/2006/main">
+            <a:pPr algn="r">
+              <a:lnSpc>
+                <a:spcPts val="1300"/>
+              </a:lnSpc>
+              <a:buNone/>
+              <a:defRPr sz="975" b="0">
+                <a:solidFill>
+                  <a:srgbClr val="8792A6"/>
+                </a:solidFill>
+                <a:latin typeface="Consolas"/>
+                <a:ea typeface="Consolas"/>
+                <a:cs typeface="Consolas"/>
+              </a:defRPr>
+            </a:pPr>
+            <a:r>
+              <a:rPr sz="975" b="0">
+                <a:solidFill>
+                  <a:srgbClr val="8792A6"/>
+                </a:solidFill>
+                <a:latin typeface="Consolas"/>
+                <a:ea typeface="Consolas"/>
+                <a:cs typeface="Consolas"/>
+              </a:rPr>
+              <a:t>12</a:t>
+            </a:r>
+          </a:p>
+          <a:p xmlns:a="http://schemas.openxmlformats.org/drawingml/2006/main">
+            <a:pPr algn="r">
+              <a:lnSpc>
+                <a:spcPts val="1300"/>
+              </a:lnSpc>
+              <a:buNone/>
+              <a:defRPr sz="975" b="0">
+                <a:solidFill>
+                  <a:srgbClr val="8792A6"/>
+                </a:solidFill>
+                <a:latin typeface="Consolas"/>
+                <a:ea typeface="Consolas"/>
+                <a:cs typeface="Consolas"/>
+              </a:defRPr>
+            </a:pPr>
+            <a:r>
+              <a:rPr sz="975" b="0">
+                <a:solidFill>
+                  <a:srgbClr val="8792A6"/>
+                </a:solidFill>
+                <a:latin typeface="Consolas"/>
+                <a:ea typeface="Consolas"/>
+                <a:cs typeface="Consolas"/>
+              </a:rPr>
+              <a:t>13</a:t>
+            </a:r>
+          </a:p>
         </p:txBody>
       </p:sp>
       <p:sp>
@@ -8153,6 +8261,9 @@
           <a:lstStyle xmlns:a="http://schemas.openxmlformats.org/drawingml/2006/main"/>
           <a:p xmlns:a="http://schemas.openxmlformats.org/drawingml/2006/main">
             <a:pPr>
+              <a:lnSpc>
+                <a:spcPts val="1300"/>
+              </a:lnSpc>
               <a:buNone/>
               <a:defRPr sz="1050">
                 <a:solidFill>
@@ -8185,7 +8296,7 @@
                   <a:srgbClr val="7651D4"/>
                 </a:solidFill>
               </a:rPr>
-              <a:t>Result</a:t>
+              <a:t>ThreatAssessment</a:t>
             </a:r>
             <a:r>
               <a:rPr b="0">
@@ -8193,7 +8304,7 @@
                   <a:srgbClr val="263044"/>
                 </a:solidFill>
               </a:rPr>
-              <a:t>&lt;</a:t>
+              <a:t> </a:t>
             </a:r>
             <a:r>
               <a:rPr b="0">
@@ -8201,7 +8312,7 @@
                   <a:srgbClr val="7651D4"/>
                 </a:solidFill>
               </a:rPr>
-              <a:t>Payment</a:t>
+              <a:t>Assess</a:t>
             </a:r>
             <a:r>
               <a:rPr b="0">
@@ -8209,7 +8320,7 @@
                   <a:srgbClr val="263044"/>
                 </a:solidFill>
               </a:rPr>
-              <a:t>&gt; </a:t>
+              <a:t>(</a:t>
             </a:r>
             <a:r>
               <a:rPr b="0">
@@ -8217,7 +8328,7 @@
                   <a:srgbClr val="7651D4"/>
                 </a:solidFill>
               </a:rPr>
-              <a:t>Create</a:t>
+              <a:t>ThreatScenario</a:t>
             </a:r>
             <a:r>
               <a:rPr b="0">
@@ -8225,27 +8336,14 @@
                   <a:srgbClr val="263044"/>
                 </a:solidFill>
               </a:rPr>
-              <a:t>(</a:t>
-            </a:r>
-            <a:r>
-              <a:rPr b="0">
-                <a:solidFill>
-                  <a:srgbClr val="7651D4"/>
-                </a:solidFill>
-              </a:rPr>
-              <a:t>ExternalRequest</a:t>
-            </a:r>
-            <a:r>
-              <a:rPr b="0">
-                <a:solidFill>
-                  <a:srgbClr val="263044"/>
-                </a:solidFill>
-              </a:rPr>
-              <a:t> input)</a:t>
+              <a:t> scenario)</a:t>
             </a:r>
           </a:p>
           <a:p xmlns:a="http://schemas.openxmlformats.org/drawingml/2006/main">
             <a:pPr>
+              <a:lnSpc>
+                <a:spcPts val="1300"/>
+              </a:lnSpc>
               <a:buNone/>
               <a:defRPr sz="1050">
                 <a:solidFill>
@@ -8267,6 +8365,9 @@
           </a:p>
           <a:p xmlns:a="http://schemas.openxmlformats.org/drawingml/2006/main">
             <a:pPr>
+              <a:lnSpc>
+                <a:spcPts val="1300"/>
+              </a:lnSpc>
               <a:buNone/>
               <a:defRPr sz="1050">
                 <a:solidFill>
@@ -8299,7 +8400,7 @@
                   <a:srgbClr val="263044"/>
                 </a:solidFill>
               </a:rPr>
-              <a:t> command = validator.</a:t>
+              <a:t> score = </a:t>
             </a:r>
             <a:r>
               <a:rPr b="0">
@@ -8307,7 +8408,7 @@
                   <a:srgbClr val="7651D4"/>
                 </a:solidFill>
               </a:rPr>
-              <a:t>ParseAndValidate</a:t>
+              <a:t>Score</a:t>
             </a:r>
             <a:r>
               <a:rPr b="0">
@@ -8315,11 +8416,14 @@
                   <a:srgbClr val="263044"/>
                 </a:solidFill>
               </a:rPr>
-              <a:t>(input);</a:t>
+              <a:t>(scenario);</a:t>
             </a:r>
           </a:p>
           <a:p xmlns:a="http://schemas.openxmlformats.org/drawingml/2006/main">
             <a:pPr>
+              <a:lnSpc>
+                <a:spcPts val="1300"/>
+              </a:lnSpc>
               <a:buNone/>
               <a:defRPr sz="1050">
                 <a:solidFill>
@@ -8344,7 +8448,7 @@
                   <a:srgbClr val="0969C3"/>
                 </a:solidFill>
               </a:rPr>
-              <a:t>if</a:t>
+              <a:t>return</a:t>
             </a:r>
             <a:r>
               <a:rPr b="0">
@@ -8352,15 +8456,31 @@
                   <a:srgbClr val="263044"/>
                 </a:solidFill>
               </a:rPr>
-              <a:t> (!trustPolicy.</a:t>
+              <a:t> </a:t>
+            </a:r>
+            <a:r>
+              <a:rPr b="1">
+                <a:solidFill>
+                  <a:srgbClr val="0969C3"/>
+                </a:solidFill>
+              </a:rPr>
+              <a:t>new</a:t>
             </a:r>
             <a:r>
               <a:rPr b="0">
                 <a:solidFill>
+                  <a:srgbClr val="263044"/>
+                </a:solidFill>
+              </a:rPr>
+              <a:t> </a:t>
+            </a:r>
+            <a:r>
+              <a:rPr b="0">
+                <a:solidFill>
                   <a:srgbClr val="7651D4"/>
                 </a:solidFill>
               </a:rPr>
-              <a:t>Accepts</a:t>
+              <a:t>ThreatAssessment</a:t>
             </a:r>
             <a:r>
               <a:rPr b="0">
@@ -8368,43 +8488,14 @@
                   <a:srgbClr val="263044"/>
                 </a:solidFill>
               </a:rPr>
-              <a:t>(command.</a:t>
-            </a:r>
-            <a:r>
-              <a:rPr b="0">
-                <a:solidFill>
-                  <a:srgbClr val="7651D4"/>
-                </a:solidFill>
-              </a:rPr>
-              <a:t>Source</a:t>
-            </a:r>
-            <a:r>
-              <a:rPr b="0">
-                <a:solidFill>
-                  <a:srgbClr val="263044"/>
-                </a:solidFill>
-              </a:rPr>
-              <a:t>, command.</a:t>
-            </a:r>
-            <a:r>
-              <a:rPr b="0">
-                <a:solidFill>
-                  <a:srgbClr val="7651D4"/>
-                </a:solidFill>
-              </a:rPr>
-              <a:t>Signature</a:t>
-            </a:r>
-            <a:r>
-              <a:rPr b="0">
-                <a:solidFill>
-                  <a:srgbClr val="263044"/>
-                </a:solidFill>
-              </a:rPr>
-              <a:t>))</a:t>
+              <a:t>(</a:t>
             </a:r>
           </a:p>
           <a:p xmlns:a="http://schemas.openxmlformats.org/drawingml/2006/main">
             <a:pPr>
+              <a:lnSpc>
+                <a:spcPts val="1300"/>
+              </a:lnSpc>
               <a:buNone/>
               <a:defRPr sz="1050">
                 <a:solidFill>
@@ -8421,75 +8512,30 @@
                   <a:srgbClr val="263044"/>
                 </a:solidFill>
               </a:rPr>
-              <a:t>        </a:t>
-            </a:r>
-            <a:r>
-              <a:rPr b="1">
-                <a:solidFill>
-                  <a:srgbClr val="0969C3"/>
-                </a:solidFill>
-              </a:rPr>
-              <a:t>return</a:t>
+              <a:t>        scenario, score, score &gt;= policy.</a:t>
             </a:r>
             <a:r>
               <a:rPr b="0">
                 <a:solidFill>
+                  <a:srgbClr val="7651D4"/>
+                </a:solidFill>
+              </a:rPr>
+              <a:t>TreatmentThreshold</a:t>
+            </a:r>
+            <a:r>
+              <a:rPr b="0">
+                <a:solidFill>
                   <a:srgbClr val="263044"/>
                 </a:solidFill>
               </a:rPr>
-              <a:t> </a:t>
-            </a:r>
-            <a:r>
-              <a:rPr b="0">
-                <a:solidFill>
-                  <a:srgbClr val="7651D4"/>
-                </a:solidFill>
-              </a:rPr>
-              <a:t>Result</a:t>
-            </a:r>
-            <a:r>
-              <a:rPr b="0">
-                <a:solidFill>
-                  <a:srgbClr val="263044"/>
-                </a:solidFill>
-              </a:rPr>
-              <a:t>.</a:t>
-            </a:r>
-            <a:r>
-              <a:rPr b="0">
-                <a:solidFill>
-                  <a:srgbClr val="7651D4"/>
-                </a:solidFill>
-              </a:rPr>
-              <a:t>Deny</a:t>
-            </a:r>
-            <a:r>
-              <a:rPr b="0">
-                <a:solidFill>
-                  <a:srgbClr val="263044"/>
-                </a:solidFill>
-              </a:rPr>
-              <a:t>(</a:t>
-            </a:r>
-            <a:r>
-              <a:rPr b="0">
-                <a:solidFill>
-                  <a:srgbClr val="B45309"/>
-                </a:solidFill>
-              </a:rPr>
-              <a:t>"untrusted_source"</a:t>
-            </a:r>
-            <a:r>
-              <a:rPr b="0">
-                <a:solidFill>
-                  <a:srgbClr val="263044"/>
-                </a:solidFill>
-              </a:rPr>
               <a:t>);</a:t>
             </a:r>
           </a:p>
           <a:p xmlns:a="http://schemas.openxmlformats.org/drawingml/2006/main">
             <a:pPr>
+              <a:lnSpc>
+                <a:spcPts val="1300"/>
+              </a:lnSpc>
               <a:buNone/>
               <a:defRPr sz="1050">
                 <a:solidFill>
@@ -8506,75 +8552,14 @@
                   <a:srgbClr val="263044"/>
                 </a:solidFill>
               </a:rPr>
-              <a:t>    </a:t>
-            </a:r>
-            <a:r>
-              <a:rPr b="1">
-                <a:solidFill>
-                  <a:srgbClr val="0969C3"/>
-                </a:solidFill>
-              </a:rPr>
-              <a:t>if</a:t>
-            </a:r>
-            <a:r>
-              <a:rPr b="0">
-                <a:solidFill>
-                  <a:srgbClr val="263044"/>
-                </a:solidFill>
-              </a:rPr>
-              <a:t> (command.</a:t>
-            </a:r>
-            <a:r>
-              <a:rPr b="0">
-                <a:solidFill>
-                  <a:srgbClr val="7651D4"/>
-                </a:solidFill>
-              </a:rPr>
-              <a:t>Amount</a:t>
-            </a:r>
-            <a:r>
-              <a:rPr b="0">
-                <a:solidFill>
-                  <a:srgbClr val="263044"/>
-                </a:solidFill>
-              </a:rPr>
-              <a:t> &gt; limits.</a:t>
-            </a:r>
-            <a:r>
-              <a:rPr b="0">
-                <a:solidFill>
-                  <a:srgbClr val="7651D4"/>
-                </a:solidFill>
-              </a:rPr>
-              <a:t>For</a:t>
-            </a:r>
-            <a:r>
-              <a:rPr b="0">
-                <a:solidFill>
-                  <a:srgbClr val="263044"/>
-                </a:solidFill>
-              </a:rPr>
-              <a:t>(command.</a:t>
-            </a:r>
-            <a:r>
-              <a:rPr b="0">
-                <a:solidFill>
-                  <a:srgbClr val="7651D4"/>
-                </a:solidFill>
-              </a:rPr>
-              <a:t>AccountId</a:t>
-            </a:r>
-            <a:r>
-              <a:rPr b="0">
-                <a:solidFill>
-                  <a:srgbClr val="263044"/>
-                </a:solidFill>
-              </a:rPr>
-              <a:t>))</a:t>
+              <a:t>}</a:t>
             </a:r>
           </a:p>
           <a:p xmlns:a="http://schemas.openxmlformats.org/drawingml/2006/main">
             <a:pPr>
+              <a:lnSpc>
+                <a:spcPts val="1300"/>
+              </a:lnSpc>
               <a:buNone/>
               <a:defRPr sz="1050">
                 <a:solidFill>
@@ -8591,75 +8576,14 @@
                   <a:srgbClr val="263044"/>
                 </a:solidFill>
               </a:rPr>
-              <a:t>        </a:t>
-            </a:r>
-            <a:r>
-              <a:rPr b="1">
-                <a:solidFill>
-                  <a:srgbClr val="0969C3"/>
-                </a:solidFill>
-              </a:rPr>
-              <a:t>return</a:t>
-            </a:r>
-            <a:r>
-              <a:rPr b="0">
-                <a:solidFill>
-                  <a:srgbClr val="263044"/>
-                </a:solidFill>
-              </a:rPr>
               <a:t> </a:t>
             </a:r>
-            <a:r>
-              <a:rPr b="0">
-                <a:solidFill>
-                  <a:srgbClr val="7651D4"/>
-                </a:solidFill>
-              </a:rPr>
-              <a:t>Result</a:t>
-            </a:r>
-            <a:r>
-              <a:rPr b="0">
-                <a:solidFill>
-                  <a:srgbClr val="263044"/>
-                </a:solidFill>
-              </a:rPr>
-              <a:t>.</a:t>
-            </a:r>
-            <a:r>
-              <a:rPr b="0">
-                <a:solidFill>
-                  <a:srgbClr val="7651D4"/>
-                </a:solidFill>
-              </a:rPr>
-              <a:t>Deny</a:t>
-            </a:r>
-            <a:r>
-              <a:rPr b="0">
-                <a:solidFill>
-                  <a:srgbClr val="263044"/>
-                </a:solidFill>
-              </a:rPr>
-              <a:t>(</a:t>
-            </a:r>
-            <a:r>
-              <a:rPr b="0">
-                <a:solidFill>
-                  <a:srgbClr val="B45309"/>
-                </a:solidFill>
-              </a:rPr>
-              <a:t>"limit_exceeded"</a:t>
-            </a:r>
-            <a:r>
-              <a:rPr b="0">
-                <a:solidFill>
-                  <a:srgbClr val="263044"/>
-                </a:solidFill>
-              </a:rPr>
-              <a:t>);</a:t>
-            </a:r>
           </a:p>
           <a:p xmlns:a="http://schemas.openxmlformats.org/drawingml/2006/main">
             <a:pPr>
+              <a:lnSpc>
+                <a:spcPts val="1300"/>
+              </a:lnSpc>
               <a:buNone/>
               <a:defRPr sz="1050">
                 <a:solidFill>
@@ -8671,11 +8595,115 @@
               </a:defRPr>
             </a:pPr>
             <a:r>
+              <a:rPr b="1">
+                <a:solidFill>
+                  <a:srgbClr val="0969C3"/>
+                </a:solidFill>
+              </a:rPr>
+              <a:t>private</a:t>
+            </a:r>
+            <a:r>
               <a:rPr b="0">
                 <a:solidFill>
                   <a:srgbClr val="263044"/>
                 </a:solidFill>
               </a:rPr>
+              <a:t> </a:t>
+            </a:r>
+            <a:r>
+              <a:rPr b="1">
+                <a:solidFill>
+                  <a:srgbClr val="0969C3"/>
+                </a:solidFill>
+              </a:rPr>
+              <a:t>int</a:t>
+            </a:r>
+            <a:r>
+              <a:rPr b="0">
+                <a:solidFill>
+                  <a:srgbClr val="263044"/>
+                </a:solidFill>
+              </a:rPr>
+              <a:t> </a:t>
+            </a:r>
+            <a:r>
+              <a:rPr b="0">
+                <a:solidFill>
+                  <a:srgbClr val="7651D4"/>
+                </a:solidFill>
+              </a:rPr>
+              <a:t>Score</a:t>
+            </a:r>
+            <a:r>
+              <a:rPr b="0">
+                <a:solidFill>
+                  <a:srgbClr val="263044"/>
+                </a:solidFill>
+              </a:rPr>
+              <a:t>(</a:t>
+            </a:r>
+            <a:r>
+              <a:rPr b="0">
+                <a:solidFill>
+                  <a:srgbClr val="7651D4"/>
+                </a:solidFill>
+              </a:rPr>
+              <a:t>ThreatScenario</a:t>
+            </a:r>
+            <a:r>
+              <a:rPr b="0">
+                <a:solidFill>
+                  <a:srgbClr val="263044"/>
+                </a:solidFill>
+              </a:rPr>
+              <a:t> scenario)</a:t>
+            </a:r>
+          </a:p>
+          <a:p xmlns:a="http://schemas.openxmlformats.org/drawingml/2006/main">
+            <a:pPr>
+              <a:lnSpc>
+                <a:spcPts val="1300"/>
+              </a:lnSpc>
+              <a:buNone/>
+              <a:defRPr sz="1050">
+                <a:solidFill>
+                  <a:srgbClr val="263044"/>
+                </a:solidFill>
+                <a:latin typeface="Consolas"/>
+                <a:ea typeface="Consolas"/>
+                <a:cs typeface="Consolas"/>
+              </a:defRPr>
+            </a:pPr>
+            <a:r>
+              <a:rPr b="0">
+                <a:solidFill>
+                  <a:srgbClr val="263044"/>
+                </a:solidFill>
+              </a:rPr>
+              <a:t>{</a:t>
+            </a:r>
+          </a:p>
+          <a:p xmlns:a="http://schemas.openxmlformats.org/drawingml/2006/main">
+            <a:pPr>
+              <a:lnSpc>
+                <a:spcPts val="1300"/>
+              </a:lnSpc>
+              <a:buNone/>
+              <a:defRPr sz="1050">
+                <a:solidFill>
+                  <a:srgbClr val="263044"/>
+                </a:solidFill>
+                <a:latin typeface="Consolas"/>
+                <a:ea typeface="Consolas"/>
+                <a:cs typeface="Consolas"/>
+              </a:defRPr>
+            </a:pPr>
+            <a:r>
+              <a:rPr b="0">
+                <a:solidFill>
+                  <a:srgbClr val="263044"/>
+                </a:solidFill>
+              </a:rPr>
               <a:t>    </a:t>
             </a:r>
             <a:r>
@@ -8684,6 +8712,126 @@
                   <a:srgbClr val="0969C3"/>
                 </a:solidFill>
               </a:rPr>
+              <a:t>var</a:t>
+            </a:r>
+            <a:r>
+              <a:rPr b="0">
+                <a:solidFill>
+                  <a:srgbClr val="263044"/>
+                </a:solidFill>
+              </a:rPr>
+              <a:t> exposure = scenario.</a:t>
+            </a:r>
+            <a:r>
+              <a:rPr b="0">
+                <a:solidFill>
+                  <a:srgbClr val="7651D4"/>
+                </a:solidFill>
+              </a:rPr>
+              <a:t>Flow</a:t>
+            </a:r>
+            <a:r>
+              <a:rPr b="0">
+                <a:solidFill>
+                  <a:srgbClr val="263044"/>
+                </a:solidFill>
+              </a:rPr>
+              <a:t>.</a:t>
+            </a:r>
+            <a:r>
+              <a:rPr b="0">
+                <a:solidFill>
+                  <a:srgbClr val="7651D4"/>
+                </a:solidFill>
+              </a:rPr>
+              <a:t>CrossesTrustBoundary</a:t>
+            </a:r>
+          </a:p>
+          <a:p xmlns:a="http://schemas.openxmlformats.org/drawingml/2006/main">
+            <a:pPr>
+              <a:lnSpc>
+                <a:spcPts val="1300"/>
+              </a:lnSpc>
+              <a:buNone/>
+              <a:defRPr sz="1050">
+                <a:solidFill>
+                  <a:srgbClr val="263044"/>
+                </a:solidFill>
+                <a:latin typeface="Consolas"/>
+                <a:ea typeface="Consolas"/>
+                <a:cs typeface="Consolas"/>
+              </a:defRPr>
+            </a:pPr>
+            <a:r>
+              <a:rPr b="0">
+                <a:solidFill>
+                  <a:srgbClr val="263044"/>
+                </a:solidFill>
+              </a:rPr>
+              <a:t>        ? policy.</a:t>
+            </a:r>
+            <a:r>
+              <a:rPr b="0">
+                <a:solidFill>
+                  <a:srgbClr val="7651D4"/>
+                </a:solidFill>
+              </a:rPr>
+              <a:t>TrustBoundaryMultiplier</a:t>
+            </a:r>
+            <a:r>
+              <a:rPr b="0">
+                <a:solidFill>
+                  <a:srgbClr val="263044"/>
+                </a:solidFill>
+              </a:rPr>
+              <a:t> : </a:t>
+            </a:r>
+            <a:r>
+              <a:rPr b="0">
+                <a:solidFill>
+                  <a:srgbClr val="B86A09"/>
+                </a:solidFill>
+              </a:rPr>
+              <a:t>1</a:t>
+            </a:r>
+            <a:r>
+              <a:rPr b="0">
+                <a:solidFill>
+                  <a:srgbClr val="263044"/>
+                </a:solidFill>
+              </a:rPr>
+              <a:t>;</a:t>
+            </a:r>
+          </a:p>
+          <a:p xmlns:a="http://schemas.openxmlformats.org/drawingml/2006/main">
+            <a:pPr>
+              <a:lnSpc>
+                <a:spcPts val="1300"/>
+              </a:lnSpc>
+              <a:buNone/>
+              <a:defRPr sz="1050">
+                <a:solidFill>
+                  <a:srgbClr val="263044"/>
+                </a:solidFill>
+                <a:latin typeface="Consolas"/>
+                <a:ea typeface="Consolas"/>
+                <a:cs typeface="Consolas"/>
+              </a:defRPr>
+            </a:pPr>
+            <a:r>
+              <a:rPr b="0">
+                <a:solidFill>
+                  <a:srgbClr val="263044"/>
+                </a:solidFill>
+              </a:rPr>
+              <a:t>    </a:t>
+            </a:r>
+            <a:r>
+              <a:rPr b="1">
+                <a:solidFill>
+                  <a:srgbClr val="0969C3"/>
+                </a:solidFill>
+              </a:rPr>
               <a:t>return</a:t>
             </a:r>
             <a:r>
@@ -8692,7 +8840,7 @@
                   <a:srgbClr val="263044"/>
                 </a:solidFill>
               </a:rPr>
-              <a:t> payments.</a:t>
+              <a:t> scenario.</a:t>
             </a:r>
             <a:r>
               <a:rPr b="0">
@@ -8700,7 +8848,7 @@
                   <a:srgbClr val="7651D4"/>
                 </a:solidFill>
               </a:rPr>
-              <a:t>Create</a:t>
+              <a:t>Likelihood</a:t>
             </a:r>
             <a:r>
               <a:rPr b="0">
@@ -8708,11 +8856,62 @@
                   <a:srgbClr val="263044"/>
                 </a:solidFill>
               </a:rPr>
-              <a:t>(command);</a:t>
+              <a:t> * scenario.</a:t>
+            </a:r>
+            <a:r>
+              <a:rPr b="0">
+                <a:solidFill>
+                  <a:srgbClr val="7651D4"/>
+                </a:solidFill>
+              </a:rPr>
+              <a:t>Flow</a:t>
+            </a:r>
+            <a:r>
+              <a:rPr b="0">
+                <a:solidFill>
+                  <a:srgbClr val="263044"/>
+                </a:solidFill>
+              </a:rPr>
+              <a:t>.</a:t>
+            </a:r>
+            <a:r>
+              <a:rPr b="0">
+                <a:solidFill>
+                  <a:srgbClr val="7651D4"/>
+                </a:solidFill>
+              </a:rPr>
+              <a:t>Asset</a:t>
+            </a:r>
+            <a:r>
+              <a:rPr b="0">
+                <a:solidFill>
+                  <a:srgbClr val="263044"/>
+                </a:solidFill>
+              </a:rPr>
+              <a:t>.</a:t>
+            </a:r>
+            <a:r>
+              <a:rPr b="0">
+                <a:solidFill>
+                  <a:srgbClr val="7651D4"/>
+                </a:solidFill>
+              </a:rPr>
+              <a:t>BusinessImpact</a:t>
+            </a:r>
+            <a:r>
+              <a:rPr b="0">
+                <a:solidFill>
+                  <a:srgbClr val="263044"/>
+                </a:solidFill>
+              </a:rPr>
+              <a:t> * exposure;</a:t>
             </a:r>
           </a:p>
           <a:p xmlns:a="http://schemas.openxmlformats.org/drawingml/2006/main">
             <a:pPr>
+              <a:lnSpc>
+                <a:spcPts val="1300"/>
+              </a:lnSpc>
               <a:buNone/>
               <a:defRPr sz="1050">
                 <a:solidFill>
@@ -8886,7 +9085,7 @@
                 <a:ea typeface="Aptos"/>
                 <a:cs typeface="Aptos"/>
               </a:rPr>
-              <a:t>Спољни улаз се прво валидира и доказује, па тек онда сме да покрене пословну промену.</a:t>
+              <a:t>Ризик је производ вероватноће и утицаја на имовину; прелазак границе поверења га увећава.</a:t>
             </a:r>
           </a:p>
         </p:txBody>
@@ -9043,7 +9242,7 @@
                 <a:ea typeface="Aptos"/>
                 <a:cs typeface="Aptos"/>
               </a:rPr>
-              <a:t>Одбијање је експлицитан исход са разлогом који се може тестирати и објаснити.</a:t>
+              <a:t>Праг третмана долази из политике, па се одлука може тестирати и образложити.</a:t>
             </a:r>
           </a:p>
         </p:txBody>
@@ -9288,7 +9487,7 @@
                 <a:ea typeface="Aptos Display"/>
                 <a:cs typeface="Aptos Display"/>
               </a:rPr>
-              <a:t>Тест доказује да претња не стиже до имовине</a:t>
+              <a:t>Тест доказује утицај границе поверења</a:t>
             </a:r>
           </a:p>
         </p:txBody>
@@ -9349,7 +9548,7 @@
                 <a:ea typeface="Aptos"/>
                 <a:cs typeface="Aptos"/>
               </a:rPr>
-              <a:t>Тест показује да спољни улаз не прелази границу поверења без предвиђене провере.</a:t>
+              <a:t>Исти сценарио добија двоструко већи резултат када ток прелази границу поверења.</a:t>
             </a:r>
           </a:p>
         </p:txBody>
@@ -9371,7 +9570,7 @@
         <p:spPr>
           <a:xfrm xmlns:a="http://schemas.openxmlformats.org/drawingml/2006/main">
             <a:off x="666750" y="2095500"/>
-            <a:ext cx="6858000" cy="2257425"/>
+            <a:ext cx="6858000" cy="1987050"/>
           </a:xfrm>
           <a:prstGeom xmlns:a="http://schemas.openxmlformats.org/drawingml/2006/main" prst="roundRect">
             <a:avLst>
@@ -9553,7 +9752,7 @@
           <a:p xmlns:a="http://schemas.openxmlformats.org/drawingml/2006/main">
             <a:pPr algn="r">
               <a:lnSpc>
-                <a:spcPct val="100000"/>
+                <a:spcPts val="1300"/>
               </a:lnSpc>
               <a:buNone/>
               <a:defRPr sz="975" b="0">
@@ -9580,7 +9779,7 @@
           <a:p xmlns:a="http://schemas.openxmlformats.org/drawingml/2006/main">
             <a:pPr algn="r">
               <a:lnSpc>
-                <a:spcPct val="100000"/>
+                <a:spcPts val="1300"/>
               </a:lnSpc>
               <a:buNone/>
               <a:defRPr sz="975" b="0">
@@ -9607,7 +9806,7 @@
           <a:p xmlns:a="http://schemas.openxmlformats.org/drawingml/2006/main">
             <a:pPr algn="r">
               <a:lnSpc>
-                <a:spcPct val="100000"/>
+                <a:spcPts val="1300"/>
               </a:lnSpc>
               <a:buNone/>
               <a:defRPr sz="975" b="0">
@@ -9634,7 +9833,7 @@
           <a:p xmlns:a="http://schemas.openxmlformats.org/drawingml/2006/main">
             <a:pPr algn="r">
               <a:lnSpc>
-                <a:spcPct val="100000"/>
+                <a:spcPts val="1300"/>
               </a:lnSpc>
               <a:buNone/>
               <a:defRPr sz="975" b="0">
@@ -9661,7 +9860,7 @@
           <a:p xmlns:a="http://schemas.openxmlformats.org/drawingml/2006/main">
             <a:pPr algn="r">
               <a:lnSpc>
-                <a:spcPct val="100000"/>
+                <a:spcPts val="1300"/>
               </a:lnSpc>
               <a:buNone/>
               <a:defRPr sz="975" b="0">
@@ -9688,7 +9887,7 @@
           <a:p xmlns:a="http://schemas.openxmlformats.org/drawingml/2006/main">
             <a:pPr algn="r">
               <a:lnSpc>
-                <a:spcPct val="100000"/>
+                <a:spcPts val="1300"/>
               </a:lnSpc>
               <a:buNone/>
               <a:defRPr sz="975" b="0">
@@ -9715,7 +9914,7 @@
           <a:p xmlns:a="http://schemas.openxmlformats.org/drawingml/2006/main">
             <a:pPr algn="r">
               <a:lnSpc>
-                <a:spcPct val="100000"/>
+                <a:spcPts val="1300"/>
               </a:lnSpc>
               <a:buNone/>
               <a:defRPr sz="975" b="0">
@@ -9742,7 +9941,7 @@
           <a:p xmlns:a="http://schemas.openxmlformats.org/drawingml/2006/main">
             <a:pPr algn="r">
               <a:lnSpc>
-                <a:spcPct val="100000"/>
+                <a:spcPts val="1300"/>
               </a:lnSpc>
               <a:buNone/>
               <a:defRPr sz="975" b="0">
@@ -9766,15 +9965,49 @@
               <a:t>8</a:t>
             </a:r>
           </a:p>
-          <a:p xmlns:a="http://schemas.openxmlformats.org/drawingml/2006/main">
-            <a:pPr algn="r">
-              <a:lnSpc>
-                <a:spcPct val="100000"/>
-              </a:lnSpc>
-              <a:buNone/>
-              <a:defRPr sz="975" b="0">
-                <a:solidFill>
-                  <a:srgbClr val="8792A6"/>
+        </p:txBody>
+      </p:sp>
+      <p:sp>
+        <p:nvSpPr>
+          <p:cNvPr id="12" name="Rectangle 11">
+            <a:extLst xmlns:a="http://schemas.openxmlformats.org/drawingml/2006/main">
+              <a:ext uri="{FF2B5EF4-FFF2-40B4-BE49-F238E27FC236}">
+                <a16:creationId xmlns:a16="http://schemas.microsoft.com/office/drawing/2014/main" id="{B6A11A29-46ED-4C0D-9BDC-F1283C1190CA}"/>
+              </a:ext>
+            </a:extLst>
+          </p:cNvPr>
+          <p:cNvSpPr>
+            <a:spLocks xmlns:a="http://schemas.openxmlformats.org/drawingml/2006/main" noGrp="1"/>
+          </p:cNvSpPr>
+          <p:nvPr/>
+        </p:nvSpPr>
+        <p:spPr>
+          <a:xfrm xmlns:a="http://schemas.openxmlformats.org/drawingml/2006/main">
+            <a:off x="1200150" y="2571750"/>
+            <a:ext cx="6153150" cy="3028950"/>
+          </a:xfrm>
+          <a:prstGeom xmlns:a="http://schemas.openxmlformats.org/drawingml/2006/main" prst="rect">
+            <a:avLst/>
+          </a:prstGeom>
+          <a:noFill xmlns:a="http://schemas.openxmlformats.org/drawingml/2006/main"/>
+          <a:ln xmlns:a="http://schemas.openxmlformats.org/drawingml/2006/main" w="0">
+            <a:noFill/>
+          </a:ln>
+        </p:spPr>
+        <p:txBody>
+          <a:bodyPr xmlns:a="http://schemas.openxmlformats.org/drawingml/2006/main" wrap="square" lIns="0" tIns="0" rIns="0" bIns="0" anchor="t">
+            <a:normAutofit/>
+          </a:bodyPr>
+          <a:lstStyle xmlns:a="http://schemas.openxmlformats.org/drawingml/2006/main"/>
+          <a:p xmlns:a="http://schemas.openxmlformats.org/drawingml/2006/main">
+            <a:pPr>
+              <a:lnSpc>
+                <a:spcPts val="1300"/>
+              </a:lnSpc>
+              <a:buNone/>
+              <a:defRPr sz="1050">
+                <a:solidFill>
+                  <a:srgbClr val="263044"/>
                 </a:solidFill>
                 <a:latin typeface="Consolas"/>
                 <a:ea typeface="Consolas"/>
@@ -9782,26 +10015,103 @@
               </a:defRPr>
             </a:pPr>
             <a:r>
-              <a:rPr sz="975" b="0">
-                <a:solidFill>
-                  <a:srgbClr val="8792A6"/>
+              <a:rPr b="0">
+                <a:solidFill>
+                  <a:srgbClr val="263044"/>
+                </a:solidFill>
+              </a:rPr>
+              <a:t>[</a:t>
+            </a:r>
+            <a:r>
+              <a:rPr b="0">
+                <a:solidFill>
+                  <a:srgbClr val="7651D4"/>
+                </a:solidFill>
+              </a:rPr>
+              <a:t>Test</a:t>
+            </a:r>
+            <a:r>
+              <a:rPr b="0">
+                <a:solidFill>
+                  <a:srgbClr val="263044"/>
+                </a:solidFill>
+              </a:rPr>
+              <a:t>]</a:t>
+            </a:r>
+          </a:p>
+          <a:p xmlns:a="http://schemas.openxmlformats.org/drawingml/2006/main">
+            <a:pPr>
+              <a:lnSpc>
+                <a:spcPts val="1300"/>
+              </a:lnSpc>
+              <a:buNone/>
+              <a:defRPr sz="1050">
+                <a:solidFill>
+                  <a:srgbClr val="263044"/>
                 </a:solidFill>
                 <a:latin typeface="Consolas"/>
                 <a:ea typeface="Consolas"/>
                 <a:cs typeface="Consolas"/>
-              </a:rPr>
-              <a:t>9</a:t>
-            </a:r>
-          </a:p>
-          <a:p xmlns:a="http://schemas.openxmlformats.org/drawingml/2006/main">
-            <a:pPr algn="r">
-              <a:lnSpc>
-                <a:spcPct val="100000"/>
-              </a:lnSpc>
-              <a:buNone/>
-              <a:defRPr sz="975" b="0">
-                <a:solidFill>
-                  <a:srgbClr val="8792A6"/>
+              </a:defRPr>
+            </a:pPr>
+            <a:r>
+              <a:rPr b="1">
+                <a:solidFill>
+                  <a:srgbClr val="0969C3"/>
+                </a:solidFill>
+              </a:rPr>
+              <a:t>public</a:t>
+            </a:r>
+            <a:r>
+              <a:rPr b="0">
+                <a:solidFill>
+                  <a:srgbClr val="263044"/>
+                </a:solidFill>
+              </a:rPr>
+              <a:t> </a:t>
+            </a:r>
+            <a:r>
+              <a:rPr b="1">
+                <a:solidFill>
+                  <a:srgbClr val="0969C3"/>
+                </a:solidFill>
+              </a:rPr>
+              <a:t>void</a:t>
+            </a:r>
+            <a:r>
+              <a:rPr b="0">
+                <a:solidFill>
+                  <a:srgbClr val="263044"/>
+                </a:solidFill>
+              </a:rPr>
+              <a:t> </a:t>
+            </a:r>
+            <a:r>
+              <a:rPr b="0">
+                <a:solidFill>
+                  <a:srgbClr val="7651D4"/>
+                </a:solidFill>
+              </a:rPr>
+              <a:t>Assess_WhenFlowCrossesTrustBoundary_DoublesTheScore</a:t>
+            </a:r>
+            <a:r>
+              <a:rPr b="0">
+                <a:solidFill>
+                  <a:srgbClr val="263044"/>
+                </a:solidFill>
+              </a:rPr>
+              <a:t>()</a:t>
+            </a:r>
+          </a:p>
+          <a:p xmlns:a="http://schemas.openxmlformats.org/drawingml/2006/main">
+            <a:pPr>
+              <a:lnSpc>
+                <a:spcPts val="1300"/>
+              </a:lnSpc>
+              <a:buNone/>
+              <a:defRPr sz="1050">
+                <a:solidFill>
+                  <a:srgbClr val="263044"/>
                 </a:solidFill>
                 <a:latin typeface="Consolas"/>
                 <a:ea typeface="Consolas"/>
@@ -9809,53 +10119,75 @@
               </a:defRPr>
             </a:pPr>
             <a:r>
-              <a:rPr sz="975" b="0">
-                <a:solidFill>
-                  <a:srgbClr val="8792A6"/>
+              <a:rPr b="0">
+                <a:solidFill>
+                  <a:srgbClr val="263044"/>
+                </a:solidFill>
+              </a:rPr>
+              <a:t>{</a:t>
+            </a:r>
+          </a:p>
+          <a:p xmlns:a="http://schemas.openxmlformats.org/drawingml/2006/main">
+            <a:pPr>
+              <a:lnSpc>
+                <a:spcPts val="1300"/>
+              </a:lnSpc>
+              <a:buNone/>
+              <a:defRPr sz="1050">
+                <a:solidFill>
+                  <a:srgbClr val="263044"/>
                 </a:solidFill>
                 <a:latin typeface="Consolas"/>
                 <a:ea typeface="Consolas"/>
                 <a:cs typeface="Consolas"/>
-              </a:rPr>
-              <a:t>10</a:t>
-            </a:r>
-          </a:p>
-        </p:txBody>
-      </p:sp>
-      <p:sp>
-        <p:nvSpPr>
-          <p:cNvPr id="12" name="Rectangle 11">
-            <a:extLst xmlns:a="http://schemas.openxmlformats.org/drawingml/2006/main">
-              <a:ext uri="{FF2B5EF4-FFF2-40B4-BE49-F238E27FC236}">
-                <a16:creationId xmlns:a16="http://schemas.microsoft.com/office/drawing/2014/main" id="{B6A11A29-46ED-4C0D-9BDC-F1283C1190CA}"/>
-              </a:ext>
-            </a:extLst>
-          </p:cNvPr>
-          <p:cNvSpPr>
-            <a:spLocks xmlns:a="http://schemas.openxmlformats.org/drawingml/2006/main" noGrp="1"/>
-          </p:cNvSpPr>
-          <p:nvPr/>
-        </p:nvSpPr>
-        <p:spPr>
-          <a:xfrm xmlns:a="http://schemas.openxmlformats.org/drawingml/2006/main">
-            <a:off x="1200150" y="2571750"/>
-            <a:ext cx="6153150" cy="3028950"/>
-          </a:xfrm>
-          <a:prstGeom xmlns:a="http://schemas.openxmlformats.org/drawingml/2006/main" prst="rect">
-            <a:avLst/>
-          </a:prstGeom>
-          <a:noFill xmlns:a="http://schemas.openxmlformats.org/drawingml/2006/main"/>
-          <a:ln xmlns:a="http://schemas.openxmlformats.org/drawingml/2006/main" w="0">
-            <a:noFill/>
-          </a:ln>
-        </p:spPr>
-        <p:txBody>
-          <a:bodyPr xmlns:a="http://schemas.openxmlformats.org/drawingml/2006/main" wrap="square" lIns="0" tIns="0" rIns="0" bIns="0" anchor="t">
-            <a:normAutofit/>
-          </a:bodyPr>
-          <a:lstStyle xmlns:a="http://schemas.openxmlformats.org/drawingml/2006/main"/>
+              </a:defRPr>
+            </a:pPr>
+            <a:r>
+              <a:rPr b="0">
+                <a:solidFill>
+                  <a:srgbClr val="263044"/>
+                </a:solidFill>
+              </a:rPr>
+              <a:t>    </a:t>
+            </a:r>
+            <a:r>
+              <a:rPr b="1">
+                <a:solidFill>
+                  <a:srgbClr val="0969C3"/>
+                </a:solidFill>
+              </a:rPr>
+              <a:t>var</a:t>
+            </a:r>
+            <a:r>
+              <a:rPr b="0">
+                <a:solidFill>
+                  <a:srgbClr val="263044"/>
+                </a:solidFill>
+              </a:rPr>
+              <a:t> assessment = _calculator.</a:t>
+            </a:r>
+            <a:r>
+              <a:rPr b="0">
+                <a:solidFill>
+                  <a:srgbClr val="7651D4"/>
+                </a:solidFill>
+              </a:rPr>
+              <a:t>Assess</a:t>
+            </a:r>
+            <a:r>
+              <a:rPr b="0">
+                <a:solidFill>
+                  <a:srgbClr val="263044"/>
+                </a:solidFill>
+              </a:rPr>
+              <a:t>(</a:t>
+            </a:r>
+          </a:p>
           <a:p xmlns:a="http://schemas.openxmlformats.org/drawingml/2006/main">
             <a:pPr>
+              <a:lnSpc>
+                <a:spcPts val="1300"/>
+              </a:lnSpc>
               <a:buNone/>
               <a:defRPr sz="1050">
                 <a:solidFill>
@@ -9872,7 +10204,7 @@
                   <a:srgbClr val="263044"/>
                 </a:solidFill>
               </a:rPr>
-              <a:t>[</a:t>
+              <a:t>        </a:t>
             </a:r>
             <a:r>
               <a:rPr b="0">
@@ -9880,7 +10212,7 @@
                   <a:srgbClr val="7651D4"/>
                 </a:solidFill>
               </a:rPr>
-              <a:t>Fact</a:t>
+              <a:t>Scenarios</a:t>
             </a:r>
             <a:r>
               <a:rPr b="0">
@@ -9888,11 +10220,78 @@
                   <a:srgbClr val="263044"/>
                 </a:solidFill>
               </a:rPr>
-              <a:t>]</a:t>
+              <a:t>.</a:t>
+            </a:r>
+            <a:r>
+              <a:rPr b="0">
+                <a:solidFill>
+                  <a:srgbClr val="7651D4"/>
+                </a:solidFill>
+              </a:rPr>
+              <a:t>Create</a:t>
+            </a:r>
+            <a:r>
+              <a:rPr b="0">
+                <a:solidFill>
+                  <a:srgbClr val="263044"/>
+                </a:solidFill>
+              </a:rPr>
+              <a:t>(</a:t>
+            </a:r>
+            <a:r>
+              <a:rPr b="0">
+                <a:solidFill>
+                  <a:srgbClr val="B86A09"/>
+                </a:solidFill>
+              </a:rPr>
+              <a:t>3</a:t>
+            </a:r>
+            <a:r>
+              <a:rPr b="0">
+                <a:solidFill>
+                  <a:srgbClr val="263044"/>
+                </a:solidFill>
+              </a:rPr>
+              <a:t>, </a:t>
+            </a:r>
+            <a:r>
+              <a:rPr b="0">
+                <a:solidFill>
+                  <a:srgbClr val="B86A09"/>
+                </a:solidFill>
+              </a:rPr>
+              <a:t>5</a:t>
+            </a:r>
+            <a:r>
+              <a:rPr b="0">
+                <a:solidFill>
+                  <a:srgbClr val="263044"/>
+                </a:solidFill>
+              </a:rPr>
+              <a:t>, crossesTrustBoundary: </a:t>
+            </a:r>
+            <a:r>
+              <a:rPr b="1">
+                <a:solidFill>
+                  <a:srgbClr val="0969C3"/>
+                </a:solidFill>
+              </a:rPr>
+              <a:t>true</a:t>
+            </a:r>
+            <a:r>
+              <a:rPr b="0">
+                <a:solidFill>
+                  <a:srgbClr val="263044"/>
+                </a:solidFill>
+              </a:rPr>
+              <a:t>));</a:t>
             </a:r>
           </a:p>
           <a:p xmlns:a="http://schemas.openxmlformats.org/drawingml/2006/main">
             <a:pPr>
+              <a:lnSpc>
+                <a:spcPts val="1300"/>
+              </a:lnSpc>
               <a:buNone/>
               <a:defRPr sz="1050">
                 <a:solidFill>
@@ -9904,14 +10303,6 @@
               </a:defRPr>
             </a:pPr>
             <a:r>
-              <a:rPr b="1">
-                <a:solidFill>
-                  <a:srgbClr val="0969C3"/>
-                </a:solidFill>
-              </a:rPr>
-              <a:t>public</a:t>
-            </a:r>
-            <a:r>
               <a:rPr b="0">
                 <a:solidFill>
                   <a:srgbClr val="263044"/>
@@ -9919,41 +10310,12 @@
               </a:rPr>
               <a:t> </a:t>
             </a:r>
-            <a:r>
-              <a:rPr b="1">
-                <a:solidFill>
-                  <a:srgbClr val="0969C3"/>
-                </a:solidFill>
-              </a:rPr>
-              <a:t>void</a:t>
-            </a:r>
-            <a:r>
-              <a:rPr b="0">
-                <a:solidFill>
-                  <a:srgbClr val="263044"/>
-                </a:solidFill>
-              </a:rPr>
-              <a:t> </a:t>
-            </a:r>
-            <a:r>
-              <a:rPr b="0">
-                <a:solidFill>
-                  <a:srgbClr val="7651D4"/>
-                </a:solidFill>
-              </a:rPr>
-              <a:t>Untrusted_input_stops_at_the_boundary</a:t>
-            </a:r>
-            <a:r>
-              <a:rPr b="0">
-                <a:solidFill>
-                  <a:srgbClr val="263044"/>
-                </a:solidFill>
-              </a:rPr>
-              <a:t>()</a:t>
-            </a:r>
           </a:p>
           <a:p xmlns:a="http://schemas.openxmlformats.org/drawingml/2006/main">
             <a:pPr>
+              <a:lnSpc>
+                <a:spcPts val="1300"/>
+              </a:lnSpc>
               <a:buNone/>
               <a:defRPr sz="1050">
                 <a:solidFill>
@@ -9970,339 +10332,110 @@
                   <a:srgbClr val="263044"/>
                 </a:solidFill>
               </a:rPr>
-              <a:t>{</a:t>
+              <a:t>    </a:t>
+            </a:r>
+            <a:r>
+              <a:rPr b="0">
+                <a:solidFill>
+                  <a:srgbClr val="7651D4"/>
+                </a:solidFill>
+              </a:rPr>
+              <a:t>Assert</a:t>
+            </a:r>
+            <a:r>
+              <a:rPr b="0">
+                <a:solidFill>
+                  <a:srgbClr val="263044"/>
+                </a:solidFill>
+              </a:rPr>
+              <a:t>.</a:t>
+            </a:r>
+            <a:r>
+              <a:rPr b="0">
+                <a:solidFill>
+                  <a:srgbClr val="7651D4"/>
+                </a:solidFill>
+              </a:rPr>
+              <a:t>That</a:t>
+            </a:r>
+            <a:r>
+              <a:rPr b="0">
+                <a:solidFill>
+                  <a:srgbClr val="263044"/>
+                </a:solidFill>
+              </a:rPr>
+              <a:t>(assessment.</a:t>
+            </a:r>
+            <a:r>
+              <a:rPr b="0">
+                <a:solidFill>
+                  <a:srgbClr val="7651D4"/>
+                </a:solidFill>
+              </a:rPr>
+              <a:t>RiskScore</a:t>
+            </a:r>
+            <a:r>
+              <a:rPr b="0">
+                <a:solidFill>
+                  <a:srgbClr val="263044"/>
+                </a:solidFill>
+              </a:rPr>
+              <a:t>, </a:t>
+            </a:r>
+            <a:r>
+              <a:rPr b="0">
+                <a:solidFill>
+                  <a:srgbClr val="7651D4"/>
+                </a:solidFill>
+              </a:rPr>
+              <a:t>Is</a:t>
+            </a:r>
+            <a:r>
+              <a:rPr b="0">
+                <a:solidFill>
+                  <a:srgbClr val="263044"/>
+                </a:solidFill>
+              </a:rPr>
+              <a:t>.</a:t>
+            </a:r>
+            <a:r>
+              <a:rPr b="0">
+                <a:solidFill>
+                  <a:srgbClr val="7651D4"/>
+                </a:solidFill>
+              </a:rPr>
+              <a:t>EqualTo</a:t>
+            </a:r>
+            <a:r>
+              <a:rPr b="0">
+                <a:solidFill>
+                  <a:srgbClr val="263044"/>
+                </a:solidFill>
+              </a:rPr>
+              <a:t>(</a:t>
+            </a:r>
+            <a:r>
+              <a:rPr b="0">
+                <a:solidFill>
+                  <a:srgbClr val="B86A09"/>
+                </a:solidFill>
+              </a:rPr>
+              <a:t>30</a:t>
+            </a:r>
+            <a:r>
+              <a:rPr b="0">
+                <a:solidFill>
+                  <a:srgbClr val="263044"/>
+                </a:solidFill>
+              </a:rPr>
+              <a:t>));</a:t>
             </a:r>
           </a:p>
           <a:p xmlns:a="http://schemas.openxmlformats.org/drawingml/2006/main">
             <a:pPr>
-              <a:buNone/>
-              <a:defRPr sz="1050">
-                <a:solidFill>
-                  <a:srgbClr val="263044"/>
-                </a:solidFill>
-                <a:latin typeface="Consolas"/>
-                <a:ea typeface="Consolas"/>
-                <a:cs typeface="Consolas"/>
-              </a:defRPr>
-            </a:pPr>
-            <a:r>
-              <a:rPr b="0">
-                <a:solidFill>
-                  <a:srgbClr val="263044"/>
-                </a:solidFill>
-              </a:rPr>
-              <a:t>    </a:t>
-            </a:r>
-            <a:r>
-              <a:rPr b="1">
-                <a:solidFill>
-                  <a:srgbClr val="0969C3"/>
-                </a:solidFill>
-              </a:rPr>
-              <a:t>var</a:t>
-            </a:r>
-            <a:r>
-              <a:rPr b="0">
-                <a:solidFill>
-                  <a:srgbClr val="263044"/>
-                </a:solidFill>
-              </a:rPr>
-              <a:t> request = </a:t>
-            </a:r>
-            <a:r>
-              <a:rPr b="0">
-                <a:solidFill>
-                  <a:srgbClr val="7651D4"/>
-                </a:solidFill>
-              </a:rPr>
-              <a:t>ExternalRequest</a:t>
-            </a:r>
-            <a:r>
-              <a:rPr b="0">
-                <a:solidFill>
-                  <a:srgbClr val="263044"/>
-                </a:solidFill>
-              </a:rPr>
-              <a:t>.</a:t>
-            </a:r>
-            <a:r>
-              <a:rPr b="0">
-                <a:solidFill>
-                  <a:srgbClr val="7651D4"/>
-                </a:solidFill>
-              </a:rPr>
-              <a:t>WithInvalidSignature</a:t>
-            </a:r>
-            <a:r>
-              <a:rPr b="0">
-                <a:solidFill>
-                  <a:srgbClr val="263044"/>
-                </a:solidFill>
-              </a:rPr>
-              <a:t>();</a:t>
-            </a:r>
-          </a:p>
-          <a:p xmlns:a="http://schemas.openxmlformats.org/drawingml/2006/main">
-            <a:pPr>
-              <a:buNone/>
-              <a:defRPr sz="1050">
-                <a:solidFill>
-                  <a:srgbClr val="263044"/>
-                </a:solidFill>
-                <a:latin typeface="Consolas"/>
-                <a:ea typeface="Consolas"/>
-                <a:cs typeface="Consolas"/>
-              </a:defRPr>
-            </a:pPr>
-            <a:endParaRPr b="0">
-              <a:solidFill>
-                <a:srgbClr val="263044"/>
-              </a:solidFill>
-            </a:endParaRPr>
-          </a:p>
-          <a:p xmlns:a="http://schemas.openxmlformats.org/drawingml/2006/main">
-            <a:pPr>
-              <a:buNone/>
-              <a:defRPr sz="1050">
-                <a:solidFill>
-                  <a:srgbClr val="263044"/>
-                </a:solidFill>
-                <a:latin typeface="Consolas"/>
-                <a:ea typeface="Consolas"/>
-                <a:cs typeface="Consolas"/>
-              </a:defRPr>
-            </a:pPr>
-            <a:r>
-              <a:rPr b="0">
-                <a:solidFill>
-                  <a:srgbClr val="263044"/>
-                </a:solidFill>
-              </a:rPr>
-              <a:t>    </a:t>
-            </a:r>
-            <a:r>
-              <a:rPr b="1">
-                <a:solidFill>
-                  <a:srgbClr val="0969C3"/>
-                </a:solidFill>
-              </a:rPr>
-              <a:t>var</a:t>
-            </a:r>
-            <a:r>
-              <a:rPr b="0">
-                <a:solidFill>
-                  <a:srgbClr val="263044"/>
-                </a:solidFill>
-              </a:rPr>
-              <a:t> result = service.</a:t>
-            </a:r>
-            <a:r>
-              <a:rPr b="0">
-                <a:solidFill>
-                  <a:srgbClr val="7651D4"/>
-                </a:solidFill>
-              </a:rPr>
-              <a:t>Create</a:t>
-            </a:r>
-            <a:r>
-              <a:rPr b="0">
-                <a:solidFill>
-                  <a:srgbClr val="263044"/>
-                </a:solidFill>
-              </a:rPr>
-              <a:t>(request);</a:t>
-            </a:r>
-          </a:p>
-          <a:p xmlns:a="http://schemas.openxmlformats.org/drawingml/2006/main">
-            <a:pPr>
-              <a:buNone/>
-              <a:defRPr sz="1050">
-                <a:solidFill>
-                  <a:srgbClr val="263044"/>
-                </a:solidFill>
-                <a:latin typeface="Consolas"/>
-                <a:ea typeface="Consolas"/>
-                <a:cs typeface="Consolas"/>
-              </a:defRPr>
-            </a:pPr>
-            <a:endParaRPr b="0">
-              <a:solidFill>
-                <a:srgbClr val="263044"/>
-              </a:solidFill>
-            </a:endParaRPr>
-          </a:p>
-          <a:p xmlns:a="http://schemas.openxmlformats.org/drawingml/2006/main">
-            <a:pPr>
-              <a:buNone/>
-              <a:defRPr sz="1050">
-                <a:solidFill>
-                  <a:srgbClr val="263044"/>
-                </a:solidFill>
-                <a:latin typeface="Consolas"/>
-                <a:ea typeface="Consolas"/>
-                <a:cs typeface="Consolas"/>
-              </a:defRPr>
-            </a:pPr>
-            <a:r>
-              <a:rPr b="0">
-                <a:solidFill>
-                  <a:srgbClr val="263044"/>
-                </a:solidFill>
-              </a:rPr>
-              <a:t>    result.</a:t>
-            </a:r>
-            <a:r>
-              <a:rPr b="0">
-                <a:solidFill>
-                  <a:srgbClr val="7651D4"/>
-                </a:solidFill>
-              </a:rPr>
-              <a:t>Reason</a:t>
-            </a:r>
-            <a:r>
-              <a:rPr b="0">
-                <a:solidFill>
-                  <a:srgbClr val="263044"/>
-                </a:solidFill>
-              </a:rPr>
-              <a:t>.</a:t>
-            </a:r>
-            <a:r>
-              <a:rPr b="0">
-                <a:solidFill>
-                  <a:srgbClr val="7651D4"/>
-                </a:solidFill>
-              </a:rPr>
-              <a:t>Should</a:t>
-            </a:r>
-            <a:r>
-              <a:rPr b="0">
-                <a:solidFill>
-                  <a:srgbClr val="263044"/>
-                </a:solidFill>
-              </a:rPr>
-              <a:t>().</a:t>
-            </a:r>
-            <a:r>
-              <a:rPr b="0">
-                <a:solidFill>
-                  <a:srgbClr val="7651D4"/>
-                </a:solidFill>
-              </a:rPr>
-              <a:t>Be</a:t>
-            </a:r>
-            <a:r>
-              <a:rPr b="0">
-                <a:solidFill>
-                  <a:srgbClr val="263044"/>
-                </a:solidFill>
-              </a:rPr>
-              <a:t>(</a:t>
-            </a:r>
-            <a:r>
-              <a:rPr b="0">
-                <a:solidFill>
-                  <a:srgbClr val="B45309"/>
-                </a:solidFill>
-              </a:rPr>
-              <a:t>"untrusted_source"</a:t>
-            </a:r>
-            <a:r>
-              <a:rPr b="0">
-                <a:solidFill>
-                  <a:srgbClr val="263044"/>
-                </a:solidFill>
-              </a:rPr>
-              <a:t>);</a:t>
-            </a:r>
-          </a:p>
-          <a:p xmlns:a="http://schemas.openxmlformats.org/drawingml/2006/main">
-            <a:pPr>
-              <a:buNone/>
-              <a:defRPr sz="1050">
-                <a:solidFill>
-                  <a:srgbClr val="263044"/>
-                </a:solidFill>
-                <a:latin typeface="Consolas"/>
-                <a:ea typeface="Consolas"/>
-                <a:cs typeface="Consolas"/>
-              </a:defRPr>
-            </a:pPr>
-            <a:r>
-              <a:rPr b="0">
-                <a:solidFill>
-                  <a:srgbClr val="263044"/>
-                </a:solidFill>
-              </a:rPr>
-              <a:t>    repository.</a:t>
-            </a:r>
-            <a:r>
-              <a:rPr b="0">
-                <a:solidFill>
-                  <a:srgbClr val="7651D4"/>
-                </a:solidFill>
-              </a:rPr>
-              <a:t>Writes</a:t>
-            </a:r>
-            <a:r>
-              <a:rPr b="0">
-                <a:solidFill>
-                  <a:srgbClr val="263044"/>
-                </a:solidFill>
-              </a:rPr>
-              <a:t>.</a:t>
-            </a:r>
-            <a:r>
-              <a:rPr b="0">
-                <a:solidFill>
-                  <a:srgbClr val="7651D4"/>
-                </a:solidFill>
-              </a:rPr>
-              <a:t>Should</a:t>
-            </a:r>
-            <a:r>
-              <a:rPr b="0">
-                <a:solidFill>
-                  <a:srgbClr val="263044"/>
-                </a:solidFill>
-              </a:rPr>
-              <a:t>().</a:t>
-            </a:r>
-            <a:r>
-              <a:rPr b="0">
-                <a:solidFill>
-                  <a:srgbClr val="7651D4"/>
-                </a:solidFill>
-              </a:rPr>
-              <a:t>Be</a:t>
-            </a:r>
-            <a:r>
-              <a:rPr b="0">
-                <a:solidFill>
-                  <a:srgbClr val="263044"/>
-                </a:solidFill>
-              </a:rPr>
-              <a:t>(</a:t>
-            </a:r>
-            <a:r>
-              <a:rPr b="0">
-                <a:solidFill>
-                  <a:srgbClr val="B86A09"/>
-                </a:solidFill>
-              </a:rPr>
-              <a:t>0</a:t>
-            </a:r>
-            <a:r>
-              <a:rPr b="0">
-                <a:solidFill>
-                  <a:srgbClr val="263044"/>
-                </a:solidFill>
-              </a:rPr>
-              <a:t>);</a:t>
-            </a:r>
-          </a:p>
-          <a:p xmlns:a="http://schemas.openxmlformats.org/drawingml/2006/main">
-            <a:pPr>
+              <a:lnSpc>
+                <a:spcPts val="1300"/>
+              </a:lnSpc>
               <a:buNone/>
               <a:defRPr sz="1050">
                 <a:solidFill>
@@ -10476,7 +10609,7 @@
                 <a:ea typeface="Aptos"/>
                 <a:cs typeface="Aptos"/>
               </a:rPr>
-              <a:t>Очекивани исход обухвата одбијање захтева и одсуство уписа у заштићено стање.</a:t>
+              <a:t>Вероватноћа 3 и утицај 5 дају 15, а уз прелазак границе поверења 30.</a:t>
             </a:r>
           </a:p>
         </p:txBody>
@@ -10633,7 +10766,7 @@
                 <a:ea typeface="Aptos"/>
                 <a:cs typeface="Aptos"/>
               </a:rPr>
-              <a:t>Тест мења једну чињеницу и очекује јасан, стабилан разлог одбијања.</a:t>
+              <a:t>Тест мења једну чињеницу и очекује тачно одређен резултат ризика.</a:t>
             </a:r>
           </a:p>
         </p:txBody>
@@ -11143,7 +11276,7 @@
           <a:p xmlns:a="http://schemas.openxmlformats.org/drawingml/2006/main">
             <a:pPr algn="r">
               <a:lnSpc>
-                <a:spcPct val="100000"/>
+                <a:spcPts val="1300"/>
               </a:lnSpc>
               <a:buNone/>
               <a:defRPr sz="1050" b="0">
@@ -11170,7 +11303,7 @@
           <a:p xmlns:a="http://schemas.openxmlformats.org/drawingml/2006/main">
             <a:pPr algn="r">
               <a:lnSpc>
-                <a:spcPct val="100000"/>
+                <a:spcPts val="1300"/>
               </a:lnSpc>
               <a:buNone/>
               <a:defRPr sz="1050" b="0">
@@ -11197,7 +11330,7 @@
           <a:p xmlns:a="http://schemas.openxmlformats.org/drawingml/2006/main">
             <a:pPr algn="r">
               <a:lnSpc>
-                <a:spcPct val="100000"/>
+                <a:spcPts val="1300"/>
               </a:lnSpc>
               <a:buNone/>
               <a:defRPr sz="1050" b="0">
@@ -11224,7 +11357,7 @@
           <a:p xmlns:a="http://schemas.openxmlformats.org/drawingml/2006/main">
             <a:pPr algn="r">
               <a:lnSpc>
-                <a:spcPct val="100000"/>
+                <a:spcPts val="1300"/>
               </a:lnSpc>
               <a:buNone/>
               <a:defRPr sz="1050" b="0">
@@ -11251,7 +11384,7 @@
           <a:p xmlns:a="http://schemas.openxmlformats.org/drawingml/2006/main">
             <a:pPr algn="r">
               <a:lnSpc>
-                <a:spcPct val="100000"/>
+                <a:spcPts val="1300"/>
               </a:lnSpc>
               <a:buNone/>
               <a:defRPr sz="1050" b="0">
@@ -11278,7 +11411,7 @@
           <a:p xmlns:a="http://schemas.openxmlformats.org/drawingml/2006/main">
             <a:pPr algn="r">
               <a:lnSpc>
-                <a:spcPct val="100000"/>
+                <a:spcPts val="1300"/>
               </a:lnSpc>
               <a:buNone/>
               <a:defRPr sz="1050" b="0">
@@ -11305,7 +11438,7 @@
           <a:p xmlns:a="http://schemas.openxmlformats.org/drawingml/2006/main">
             <a:pPr algn="r">
               <a:lnSpc>
-                <a:spcPct val="100000"/>
+                <a:spcPts val="1300"/>
               </a:lnSpc>
               <a:buNone/>
               <a:defRPr sz="1050" b="0">
@@ -11332,7 +11465,7 @@
           <a:p xmlns:a="http://schemas.openxmlformats.org/drawingml/2006/main">
             <a:pPr algn="r">
               <a:lnSpc>
-                <a:spcPct val="100000"/>
+                <a:spcPts val="1300"/>
               </a:lnSpc>
               <a:buNone/>
               <a:defRPr sz="1050" b="0">
@@ -11392,6 +11525,9 @@
           <a:lstStyle xmlns:a="http://schemas.openxmlformats.org/drawingml/2006/main"/>
           <a:p xmlns:a="http://schemas.openxmlformats.org/drawingml/2006/main">
             <a:pPr>
+              <a:lnSpc>
+                <a:spcPts val="1300"/>
+              </a:lnSpc>
               <a:buNone/>
               <a:defRPr sz="1125">
                 <a:solidFill>
@@ -11413,6 +11549,9 @@
           </a:p>
           <a:p xmlns:a="http://schemas.openxmlformats.org/drawingml/2006/main">
             <a:pPr>
+              <a:lnSpc>
+                <a:spcPts val="1300"/>
+              </a:lnSpc>
               <a:buNone/>
               <a:defRPr sz="1125">
                 <a:solidFill>
@@ -11466,6 +11605,9 @@
           </a:p>
           <a:p xmlns:a="http://schemas.openxmlformats.org/drawingml/2006/main">
             <a:pPr>
+              <a:lnSpc>
+                <a:spcPts val="1300"/>
+              </a:lnSpc>
               <a:buNone/>
               <a:defRPr sz="1125">
                 <a:solidFill>
@@ -11519,6 +11661,9 @@
           </a:p>
           <a:p xmlns:a="http://schemas.openxmlformats.org/drawingml/2006/main">
             <a:pPr>
+              <a:lnSpc>
+                <a:spcPts val="1300"/>
+              </a:lnSpc>
               <a:buNone/>
               <a:defRPr sz="1125">
                 <a:solidFill>
@@ -11572,6 +11717,9 @@
           </a:p>
           <a:p xmlns:a="http://schemas.openxmlformats.org/drawingml/2006/main">
             <a:pPr>
+              <a:lnSpc>
+                <a:spcPts val="1300"/>
+              </a:lnSpc>
               <a:buNone/>
               <a:defRPr sz="1125">
                 <a:solidFill>
@@ -11625,6 +11773,9 @@
           </a:p>
           <a:p xmlns:a="http://schemas.openxmlformats.org/drawingml/2006/main">
             <a:pPr>
+              <a:lnSpc>
+                <a:spcPts val="1300"/>
+              </a:lnSpc>
               <a:buNone/>
               <a:defRPr sz="1125">
                 <a:solidFill>
@@ -11678,6 +11829,9 @@
           </a:p>
           <a:p xmlns:a="http://schemas.openxmlformats.org/drawingml/2006/main">
             <a:pPr>
+              <a:lnSpc>
+                <a:spcPts val="1300"/>
+              </a:lnSpc>
               <a:buNone/>
               <a:defRPr sz="1125">
                 <a:solidFill>
@@ -11723,6 +11877,9 @@
           </a:p>
           <a:p xmlns:a="http://schemas.openxmlformats.org/drawingml/2006/main">
             <a:pPr>
+              <a:lnSpc>
+                <a:spcPts val="1300"/>
+              </a:lnSpc>
               <a:buNone/>
               <a:defRPr sz="1125">
                 <a:solidFill>
@@ -20340,7 +20497,7 @@
                 <a:ea typeface="Aptos"/>
                 <a:cs typeface="Aptos"/>
               </a:rPr>
-              <a:t>Имовина има власника, значај и животни циклус.</a:t>
+              <a:t>Имовина има власника, значај за пословање и животни циклус.</a:t>
             </a:r>
           </a:p>
         </p:txBody>
@@ -20564,7 +20721,7 @@
                 <a:ea typeface="Aptos"/>
                 <a:cs typeface="Aptos"/>
               </a:rPr>
-              <a:t>Имовина обухвата базу података, налоге, кључеве, сервисне идентитете, конфигурацију и пословне записе.</a:t>
+              <a:t>Утицај на пословање је оцена имовине, а не особина појединачне претње.</a:t>
             </a:r>
           </a:p>
         </p:txBody>
@@ -20788,7 +20945,7 @@
                 <a:ea typeface="Aptos"/>
                 <a:cs typeface="Aptos"/>
               </a:rPr>
-              <a:t>Критичност имовине одређује колико брзо се реагује и колико је доказа потребно.</a:t>
+              <a:t>Инвентар је користан тек када се оцена имовине користи у процени ризика.</a:t>
             </a:r>
           </a:p>
         </p:txBody>
@@ -21099,7 +21256,7 @@
                 <a:ea typeface="Aptos"/>
                 <a:cs typeface="Aptos"/>
               </a:rPr>
-              <a:t>Који ток осетљивог податка прелази границу поверења и на ком месту се претпоставка мења?</a:t>
+              <a:t>Која имовина у вашој целини има највећи пословни утицај и ко је њен власник?</a:t>
             </a:r>
           </a:p>
         </p:txBody>
@@ -21568,7 +21725,7 @@
                 <a:ea typeface="Aptos"/>
                 <a:cs typeface="Aptos"/>
               </a:rPr>
-              <a:t>Интеграција спољне компоненте не представља основ за доделу поверења.</a:t>
+              <a:t>Ток података показује одакле информација долази, куда иде и ко је успут обрађује.</a:t>
             </a:r>
           </a:p>
         </p:txBody>
@@ -21792,7 +21949,7 @@
                 <a:ea typeface="Aptos"/>
                 <a:cs typeface="Aptos"/>
               </a:rPr>
-              <a:t>Граница поверења може бити API позив, ред порука, административни интерфејс или извоз у датотеку.</a:t>
+              <a:t>Сваки ток је везан за имовину коју преноси, па наслеђује њен значај.</a:t>
             </a:r>
           </a:p>
         </p:txBody>
@@ -22016,7 +22173,7 @@
                 <a:ea typeface="Aptos"/>
                 <a:cs typeface="Aptos"/>
               </a:rPr>
-              <a:t>Ток података открива места на којима информација може бити измењена, изгубљена или погрешно изложена.</a:t>
+              <a:t>Дијаграм тока се ажурира када се промени интеграција, извоз или место чувања.</a:t>
             </a:r>
           </a:p>
         </p:txBody>
@@ -22327,7 +22484,7 @@
                 <a:ea typeface="Aptos"/>
                 <a:cs typeface="Aptos"/>
               </a:rPr>
-              <a:t>Који ток осетљивог податка прелази границу поверења и на ком месту се претпоставка мења?</a:t>
+              <a:t>Који ток осетљивог податка у вашем систему има највише учесника?</a:t>
             </a:r>
           </a:p>
         </p:txBody>
@@ -22796,7 +22953,7 @@
                 <a:ea typeface="Aptos"/>
                 <a:cs typeface="Aptos"/>
               </a:rPr>
-              <a:t>Претња постаје корисна када води до захтева, контроле и начина провере.</a:t>
+              <a:t>Граница поверења је место где престаје да важи претпоставка о пореклу и исправности податка.</a:t>
             </a:r>
           </a:p>
         </p:txBody>
@@ -23020,7 +23177,7 @@
                 <a:ea typeface="Aptos"/>
                 <a:cs typeface="Aptos"/>
               </a:rPr>
-              <a:t>Модел претњи обухвата ограничен број реалних сценарија, одговарајуће контроле и начине њихове провере.</a:t>
+              <a:t>Ток који прелази границу поверења носи већи ризик и тражи експлицитну проверу.</a:t>
             </a:r>
           </a:p>
         </p:txBody>
@@ -23244,7 +23401,7 @@
                 <a:ea typeface="Aptos"/>
                 <a:cs typeface="Aptos"/>
               </a:rPr>
-              <a:t>Претња добија приоритет према утицају, вероватноћи и реалним постојећим контролама.</a:t>
+              <a:t>За сваку границу се бележи која претпоставка више не важи и која је контрола замењује.</a:t>
             </a:r>
           </a:p>
         </p:txBody>
@@ -24024,7 +24181,7 @@
                 <a:ea typeface="Aptos"/>
                 <a:cs typeface="Aptos"/>
               </a:rPr>
-              <a:t>Критичност имовине одређује колико брзо се реагује и колико је доказа потребно.</a:t>
+              <a:t>Претња је конкретан сценарио: ко, преко ког тока, шта може да наруши.</a:t>
             </a:r>
           </a:p>
         </p:txBody>
@@ -24248,7 +24405,7 @@
                 <a:ea typeface="Aptos"/>
                 <a:cs typeface="Aptos"/>
               </a:rPr>
-              <a:t>Ток података открива места на којима информација може бити измењена, изгубљена или погрешно изложена.</a:t>
+              <a:t>Ризик је производ вероватноће и утицаја; праг из политике одређује шта се мора третирати.</a:t>
             </a:r>
           </a:p>
         </p:txBody>
@@ -24472,7 +24629,7 @@
                 <a:ea typeface="Aptos"/>
                 <a:cs typeface="Aptos"/>
               </a:rPr>
-              <a:t>Претња добија приоритет према утицају, вероватноћи и реалним постојећим контролама.</a:t>
+              <a:t>Преостали ризик се бележи заједно са контролом и њеним ограничењима.</a:t>
             </a:r>
           </a:p>
         </p:txBody>
@@ -24783,7 +24940,7 @@
                 <a:ea typeface="Aptos"/>
                 <a:cs typeface="Aptos"/>
               </a:rPr>
-              <a:t>Који ток осетљивог податка прелази границу поверења и на ком месту се претпоставка мења?</a:t>
+              <a:t>Који сценарио у вашем моделу прелази праг третмана и која контрола на њега одговара?</a:t>
             </a:r>
           </a:p>
         </p:txBody>
